--- a/someproject11/artifacts/kickoff-deck.pptx
+++ b/someproject11/artifacts/kickoff-deck.pptx
@@ -19,6 +19,7 @@
     <p:sldId id="866" r:id="rId10"/>
     <p:sldId id="858" r:id="rId11"/>
     <p:sldId id="859" r:id="rId12"/>
+    <p:sldId id="901" r:id="rId39"/>
     <p:sldId id="554" r:id="rId13"/>
   </p:sldIdLst>
   <p:sldSz cx="12192000" cy="6858000"/>
@@ -9778,6 +9779,292 @@
         <p14:creationId xmlns:p14="http://schemas.microsoft.com/office/powerpoint/2010/main" val="247990684"/>
       </p:ext>
     </p:extLst>
+  </p:cSld>
+  <p:clrMapOvr>
+    <a:masterClrMapping/>
+  </p:clrMapOvr>
+</p:sld>
+</file>
+
+<file path=ppt/slides/slide10.xml><?xml version="1.0" encoding="utf-8"?>
+<p:sld xmlns:a="http://schemas.openxmlformats.org/drawingml/2006/main" xmlns:p="http://schemas.openxmlformats.org/presentationml/2006/main" xmlns:r="http://schemas.openxmlformats.org/officeDocument/2006/relationships">
+  <p:cSld>
+    <p:spTree>
+      <p:nvGrpSpPr>
+        <p:cNvPr id="1" name=""/>
+        <p:cNvGrpSpPr/>
+        <p:nvPr/>
+      </p:nvGrpSpPr>
+      <p:grpSpPr/>
+      <p:sp>
+        <p:nvSpPr>
+          <p:cNvPr id="2" name="Text Placeholder 1"/>
+          <p:cNvSpPr>
+            <a:spLocks noGrp="1"/>
+          </p:cNvSpPr>
+          <p:nvPr>
+            <p:ph type="body" idx="10" sz="quarter"/>
+          </p:nvPr>
+        </p:nvSpPr>
+        <p:spPr/>
+        <p:txBody>
+          <a:bodyPr/>
+          <a:lstStyle/>
+          <a:p>
+            <a:r>
+              <a:t>Meeting Summary</a:t>
+            </a:r>
+          </a:p>
+        </p:txBody>
+      </p:sp>
+      <p:sp>
+        <p:nvSpPr>
+          <p:cNvPr id="3" name="Text Placeholder 2"/>
+          <p:cNvSpPr>
+            <a:spLocks noGrp="1"/>
+          </p:cNvSpPr>
+          <p:nvPr>
+            <p:ph type="body" idx="11" sz="quarter"/>
+          </p:nvPr>
+        </p:nvSpPr>
+        <p:spPr/>
+        <p:txBody>
+          <a:bodyPr/>
+          <a:lstStyle/>
+          <a:p>
+            <a:r>
+              <a:t>Transcription Project Kickoff</a:t>
+            </a:r>
+          </a:p>
+        </p:txBody>
+      </p:sp>
+      <p:sp>
+        <p:nvSpPr>
+          <p:cNvPr id="4" name="Text Placeholder 3"/>
+          <p:cNvSpPr>
+            <a:spLocks noGrp="1"/>
+          </p:cNvSpPr>
+          <p:nvPr>
+            <p:ph type="body" idx="12" sz="quarter"/>
+          </p:nvPr>
+        </p:nvSpPr>
+        <p:spPr/>
+        <p:txBody>
+          <a:bodyPr/>
+          <a:lstStyle/>
+          <a:p>
+            <a:pPr>
+              <a:spcAft>
+                <a:spcPts val="600"/>
+              </a:spcAft>
+              <a:buNone/>
+            </a:pPr>
+            <a:r>
+              <a:rPr lang="en-US" sz="1800">
+                <a:solidFill>
+                  <a:srgbClr val="1D4159"/>
+                </a:solidFill>
+                <a:latin typeface="Roboto Medium" panose="02000000000000000000" pitchFamily="2" charset="0"/>
+                <a:ea typeface="Roboto Medium" panose="02000000000000000000" pitchFamily="2" charset="0"/>
+              </a:rPr>
+              <a:t>Meeting Purpose</a:t>
+            </a:r>
+          </a:p>
+          <a:p>
+            <a:pPr marL="180000" indent="-180000">
+              <a:spcAft>
+                <a:spcPts val="300"/>
+              </a:spcAft>
+              <a:buClr>
+                <a:srgbClr val="F17042"/>
+              </a:buClr>
+              <a:buFont typeface="Arial" panose="020B0604020202020204" pitchFamily="34" charset="0"/>
+              <a:buChar char="•"/>
+            </a:pPr>
+            <a:r>
+              <a:rPr lang="en-US" sz="1600">
+                <a:solidFill>
+                  <a:srgbClr val="1D4159"/>
+                </a:solidFill>
+                <a:latin typeface="Roboto" panose="02000000000000000000" pitchFamily="2" charset="0"/>
+                <a:ea typeface="Roboto" panose="02000000000000000000" pitchFamily="2" charset="0"/>
+              </a:rPr>
+              <a:t>Test transcription functionality implementation</a:t>
+            </a:r>
+          </a:p>
+          <a:p>
+            <a:pPr marL="180000" indent="-180000">
+              <a:spcAft>
+                <a:spcPts val="300"/>
+              </a:spcAft>
+              <a:buClr>
+                <a:srgbClr val="F17042"/>
+              </a:buClr>
+              <a:buFont typeface="Arial" panose="020B0604020202020204" pitchFamily="34" charset="0"/>
+              <a:buChar char="•"/>
+            </a:pPr>
+            <a:r>
+              <a:rPr lang="en-US" sz="1600">
+                <a:solidFill>
+                  <a:srgbClr val="1D4159"/>
+                </a:solidFill>
+                <a:latin typeface="Roboto" panose="02000000000000000000" pitchFamily="2" charset="0"/>
+                <a:ea typeface="Roboto" panose="02000000000000000000" pitchFamily="2" charset="0"/>
+              </a:rPr>
+              <a:t>Verify service performance and accuracy</a:t>
+            </a:r>
+          </a:p>
+          <a:p>
+            <a:pPr>
+              <a:spcAft>
+                <a:spcPts val="0"/>
+              </a:spcAft>
+            </a:pPr>
+            <a:endParaRPr lang="en-US"/>
+          </a:p>
+          <a:p>
+            <a:pPr>
+              <a:spcAft>
+                <a:spcPts val="600"/>
+              </a:spcAft>
+              <a:buNone/>
+            </a:pPr>
+            <a:r>
+              <a:rPr lang="en-US" sz="1800">
+                <a:solidFill>
+                  <a:srgbClr val="1D4159"/>
+                </a:solidFill>
+                <a:latin typeface="Roboto Medium" panose="02000000000000000000" pitchFamily="2" charset="0"/>
+                <a:ea typeface="Roboto Medium" panose="02000000000000000000" pitchFamily="2" charset="0"/>
+              </a:rPr>
+              <a:t>Key Decisions</a:t>
+            </a:r>
+          </a:p>
+          <a:p>
+            <a:pPr marL="180000" indent="-180000">
+              <a:spcAft>
+                <a:spcPts val="300"/>
+              </a:spcAft>
+              <a:buClr>
+                <a:srgbClr val="F17042"/>
+              </a:buClr>
+              <a:buFont typeface="Arial" panose="020B0604020202020204" pitchFamily="34" charset="0"/>
+              <a:buChar char="•"/>
+            </a:pPr>
+            <a:r>
+              <a:rPr lang="en-US" sz="1600">
+                <a:solidFill>
+                  <a:srgbClr val="1D4159"/>
+                </a:solidFill>
+                <a:latin typeface="Roboto" panose="02000000000000000000" pitchFamily="2" charset="0"/>
+                <a:ea typeface="Roboto" panose="02000000000000000000" pitchFamily="2" charset="0"/>
+              </a:rPr>
+              <a:t>Transcription being applied to project</a:t>
+            </a:r>
+          </a:p>
+          <a:p>
+            <a:pPr marL="180000" indent="-180000">
+              <a:spcAft>
+                <a:spcPts val="300"/>
+              </a:spcAft>
+              <a:buClr>
+                <a:srgbClr val="F17042"/>
+              </a:buClr>
+              <a:buFont typeface="Arial" panose="020B0604020202020204" pitchFamily="34" charset="0"/>
+              <a:buChar char="•"/>
+            </a:pPr>
+            <a:r>
+              <a:rPr lang="en-US" sz="1600">
+                <a:solidFill>
+                  <a:srgbClr val="1D4159"/>
+                </a:solidFill>
+                <a:latin typeface="Roboto" panose="02000000000000000000" pitchFamily="2" charset="0"/>
+                <a:ea typeface="Roboto" panose="02000000000000000000" pitchFamily="2" charset="0"/>
+              </a:rPr>
+              <a:t>Results required for project implementation</a:t>
+            </a:r>
+          </a:p>
+          <a:p>
+            <a:pPr>
+              <a:spcAft>
+                <a:spcPts val="0"/>
+              </a:spcAft>
+            </a:pPr>
+            <a:endParaRPr lang="en-US"/>
+          </a:p>
+          <a:p>
+            <a:pPr>
+              <a:spcAft>
+                <a:spcPts val="600"/>
+              </a:spcAft>
+              <a:buNone/>
+            </a:pPr>
+            <a:r>
+              <a:rPr lang="en-US" sz="1800">
+                <a:solidFill>
+                  <a:srgbClr val="1D4159"/>
+                </a:solidFill>
+                <a:latin typeface="Roboto Medium" panose="02000000000000000000" pitchFamily="2" charset="0"/>
+                <a:ea typeface="Roboto Medium" panose="02000000000000000000" pitchFamily="2" charset="0"/>
+              </a:rPr>
+              <a:t>Action Items</a:t>
+            </a:r>
+          </a:p>
+          <a:p>
+            <a:pPr marL="180000" indent="-180000">
+              <a:spcAft>
+                <a:spcPts val="300"/>
+              </a:spcAft>
+              <a:buClr>
+                <a:srgbClr val="F17042"/>
+              </a:buClr>
+              <a:buFont typeface="Arial" panose="020B0604020202020204" pitchFamily="34" charset="0"/>
+              <a:buChar char="•"/>
+            </a:pPr>
+            <a:r>
+              <a:rPr lang="en-US" sz="1600">
+                <a:solidFill>
+                  <a:srgbClr val="1D4159"/>
+                </a:solidFill>
+                <a:latin typeface="Roboto" panose="02000000000000000000" pitchFamily="2" charset="0"/>
+                <a:ea typeface="Roboto" panose="02000000000000000000" pitchFamily="2" charset="0"/>
+              </a:rPr>
+              <a:t>Verify effectiveness and accuracy of transcription</a:t>
+            </a:r>
+          </a:p>
+          <a:p>
+            <a:pPr marL="180000" indent="-180000">
+              <a:spcAft>
+                <a:spcPts val="300"/>
+              </a:spcAft>
+              <a:buClr>
+                <a:srgbClr val="F17042"/>
+              </a:buClr>
+              <a:buFont typeface="Arial" panose="020B0604020202020204" pitchFamily="34" charset="0"/>
+              <a:buChar char="•"/>
+            </a:pPr>
+            <a:r>
+              <a:rPr lang="en-US" sz="1600">
+                <a:solidFill>
+                  <a:srgbClr val="1D4159"/>
+                </a:solidFill>
+                <a:latin typeface="Roboto" panose="02000000000000000000" pitchFamily="2" charset="0"/>
+                <a:ea typeface="Roboto" panose="02000000000000000000" pitchFamily="2" charset="0"/>
+              </a:rPr>
+              <a:t>Integrate service into project workflow</a:t>
+            </a:r>
+          </a:p>
+          <a:p>
+            <a:pPr>
+              <a:spcAft>
+                <a:spcPts val="0"/>
+              </a:spcAft>
+            </a:pPr>
+            <a:endParaRPr lang="en-US"/>
+          </a:p>
+        </p:txBody>
+      </p:sp>
+    </p:spTree>
   </p:cSld>
   <p:clrMapOvr>
     <a:masterClrMapping/>

--- a/someproject11/artifacts/kickoff-deck.pptx
+++ b/someproject11/artifacts/kickoff-deck.pptx
@@ -9833,7 +9833,7 @@
           <a:lstStyle/>
           <a:p>
             <a:r>
-              <a:t>Transcription Project Kickoff</a:t>
+              <a:t>Transcription Functionality Test</a:t>
             </a:r>
           </a:p>
         </p:txBody>
@@ -9867,7 +9867,7 @@
                 <a:latin typeface="Roboto Medium" panose="02000000000000000000" pitchFamily="2" charset="0"/>
                 <a:ea typeface="Roboto Medium" panose="02000000000000000000" pitchFamily="2" charset="0"/>
               </a:rPr>
-              <a:t>Meeting Purpose</a:t>
+              <a:t>Meeting Summary</a:t>
             </a:r>
           </a:p>
           <a:p>
@@ -9889,7 +9889,7 @@
                 <a:latin typeface="Roboto" panose="02000000000000000000" pitchFamily="2" charset="0"/>
                 <a:ea typeface="Roboto" panose="02000000000000000000" pitchFamily="2" charset="0"/>
               </a:rPr>
-              <a:t>Test transcription functionality implementation</a:t>
+              <a:t>Tested transcription functionality</a:t>
             </a:r>
           </a:p>
           <a:p>
@@ -9911,33 +9911,7 @@
                 <a:latin typeface="Roboto" panose="02000000000000000000" pitchFamily="2" charset="0"/>
                 <a:ea typeface="Roboto" panose="02000000000000000000" pitchFamily="2" charset="0"/>
               </a:rPr>
-              <a:t>Verify service performance and accuracy</a:t>
-            </a:r>
-          </a:p>
-          <a:p>
-            <a:pPr>
-              <a:spcAft>
-                <a:spcPts val="0"/>
-              </a:spcAft>
-            </a:pPr>
-            <a:endParaRPr lang="en-US"/>
-          </a:p>
-          <a:p>
-            <a:pPr>
-              <a:spcAft>
-                <a:spcPts val="600"/>
-              </a:spcAft>
-              <a:buNone/>
-            </a:pPr>
-            <a:r>
-              <a:rPr lang="en-US" sz="1800">
-                <a:solidFill>
-                  <a:srgbClr val="1D4159"/>
-                </a:solidFill>
-                <a:latin typeface="Roboto Medium" panose="02000000000000000000" pitchFamily="2" charset="0"/>
-                <a:ea typeface="Roboto Medium" panose="02000000000000000000" pitchFamily="2" charset="0"/>
-              </a:rPr>
-              <a:t>Key Decisions</a:t>
+              <a:t>Verified transcription system effectiveness</a:t>
             </a:r>
           </a:p>
           <a:p>
@@ -9959,7 +9933,7 @@
                 <a:latin typeface="Roboto" panose="02000000000000000000" pitchFamily="2" charset="0"/>
                 <a:ea typeface="Roboto" panose="02000000000000000000" pitchFamily="2" charset="0"/>
               </a:rPr>
-              <a:t>Transcription being applied to project</a:t>
+              <a:t>Core requirement: Apply results to project</a:t>
             </a:r>
           </a:p>
           <a:p>
@@ -9981,33 +9955,7 @@
                 <a:latin typeface="Roboto" panose="02000000000000000000" pitchFamily="2" charset="0"/>
                 <a:ea typeface="Roboto" panose="02000000000000000000" pitchFamily="2" charset="0"/>
               </a:rPr>
-              <a:t>Results required for project implementation</a:t>
-            </a:r>
-          </a:p>
-          <a:p>
-            <a:pPr>
-              <a:spcAft>
-                <a:spcPts val="0"/>
-              </a:spcAft>
-            </a:pPr>
-            <a:endParaRPr lang="en-US"/>
-          </a:p>
-          <a:p>
-            <a:pPr>
-              <a:spcAft>
-                <a:spcPts val="600"/>
-              </a:spcAft>
-              <a:buNone/>
-            </a:pPr>
-            <a:r>
-              <a:rPr lang="en-US" sz="1800">
-                <a:solidFill>
-                  <a:srgbClr val="1D4159"/>
-                </a:solidFill>
-                <a:latin typeface="Roboto Medium" panose="02000000000000000000" pitchFamily="2" charset="0"/>
-                <a:ea typeface="Roboto Medium" panose="02000000000000000000" pitchFamily="2" charset="0"/>
-              </a:rPr>
-              <a:t>Action Items</a:t>
+              <a:t>Evaluate transcription accuracy</a:t>
             </a:r>
           </a:p>
           <a:p>
@@ -10029,29 +9977,7 @@
                 <a:latin typeface="Roboto" panose="02000000000000000000" pitchFamily="2" charset="0"/>
                 <a:ea typeface="Roboto" panose="02000000000000000000" pitchFamily="2" charset="0"/>
               </a:rPr>
-              <a:t>Verify effectiveness and accuracy of transcription</a:t>
-            </a:r>
-          </a:p>
-          <a:p>
-            <a:pPr marL="180000" indent="-180000">
-              <a:spcAft>
-                <a:spcPts val="300"/>
-              </a:spcAft>
-              <a:buClr>
-                <a:srgbClr val="F17042"/>
-              </a:buClr>
-              <a:buFont typeface="Arial" panose="020B0604020202020204" pitchFamily="34" charset="0"/>
-              <a:buChar char="•"/>
-            </a:pPr>
-            <a:r>
-              <a:rPr lang="en-US" sz="1600">
-                <a:solidFill>
-                  <a:srgbClr val="1D4159"/>
-                </a:solidFill>
-                <a:latin typeface="Roboto" panose="02000000000000000000" pitchFamily="2" charset="0"/>
-                <a:ea typeface="Roboto" panose="02000000000000000000" pitchFamily="2" charset="0"/>
-              </a:rPr>
-              <a:t>Integrate service into project workflow</a:t>
+              <a:t>Develop integration plan</a:t>
             </a:r>
           </a:p>
           <a:p>

--- a/someproject11/artifacts/kickoff-deck.pptx
+++ b/someproject11/artifacts/kickoff-deck.pptx
@@ -19,7 +19,6 @@
     <p:sldId id="866" r:id="rId10"/>
     <p:sldId id="858" r:id="rId11"/>
     <p:sldId id="859" r:id="rId12"/>
-    <p:sldId id="901" r:id="rId39"/>
     <p:sldId id="554" r:id="rId13"/>
   </p:sldIdLst>
   <p:sldSz cx="12192000" cy="6858000"/>
@@ -9779,218 +9778,6 @@
         <p14:creationId xmlns:p14="http://schemas.microsoft.com/office/powerpoint/2010/main" val="247990684"/>
       </p:ext>
     </p:extLst>
-  </p:cSld>
-  <p:clrMapOvr>
-    <a:masterClrMapping/>
-  </p:clrMapOvr>
-</p:sld>
-</file>
-
-<file path=ppt/slides/slide10.xml><?xml version="1.0" encoding="utf-8"?>
-<p:sld xmlns:a="http://schemas.openxmlformats.org/drawingml/2006/main" xmlns:p="http://schemas.openxmlformats.org/presentationml/2006/main" xmlns:r="http://schemas.openxmlformats.org/officeDocument/2006/relationships">
-  <p:cSld>
-    <p:spTree>
-      <p:nvGrpSpPr>
-        <p:cNvPr id="1" name=""/>
-        <p:cNvGrpSpPr/>
-        <p:nvPr/>
-      </p:nvGrpSpPr>
-      <p:grpSpPr/>
-      <p:sp>
-        <p:nvSpPr>
-          <p:cNvPr id="2" name="Text Placeholder 1"/>
-          <p:cNvSpPr>
-            <a:spLocks noGrp="1"/>
-          </p:cNvSpPr>
-          <p:nvPr>
-            <p:ph type="body" idx="10" sz="quarter"/>
-          </p:nvPr>
-        </p:nvSpPr>
-        <p:spPr/>
-        <p:txBody>
-          <a:bodyPr/>
-          <a:lstStyle/>
-          <a:p>
-            <a:r>
-              <a:t>Meeting Summary</a:t>
-            </a:r>
-          </a:p>
-        </p:txBody>
-      </p:sp>
-      <p:sp>
-        <p:nvSpPr>
-          <p:cNvPr id="3" name="Text Placeholder 2"/>
-          <p:cNvSpPr>
-            <a:spLocks noGrp="1"/>
-          </p:cNvSpPr>
-          <p:nvPr>
-            <p:ph type="body" idx="11" sz="quarter"/>
-          </p:nvPr>
-        </p:nvSpPr>
-        <p:spPr/>
-        <p:txBody>
-          <a:bodyPr/>
-          <a:lstStyle/>
-          <a:p>
-            <a:r>
-              <a:t>Transcription Functionality Test</a:t>
-            </a:r>
-          </a:p>
-        </p:txBody>
-      </p:sp>
-      <p:sp>
-        <p:nvSpPr>
-          <p:cNvPr id="4" name="Text Placeholder 3"/>
-          <p:cNvSpPr>
-            <a:spLocks noGrp="1"/>
-          </p:cNvSpPr>
-          <p:nvPr>
-            <p:ph type="body" idx="12" sz="quarter"/>
-          </p:nvPr>
-        </p:nvSpPr>
-        <p:spPr/>
-        <p:txBody>
-          <a:bodyPr/>
-          <a:lstStyle/>
-          <a:p>
-            <a:pPr>
-              <a:spcAft>
-                <a:spcPts val="600"/>
-              </a:spcAft>
-              <a:buNone/>
-            </a:pPr>
-            <a:r>
-              <a:rPr lang="en-US" sz="1800">
-                <a:solidFill>
-                  <a:srgbClr val="1D4159"/>
-                </a:solidFill>
-                <a:latin typeface="Roboto Medium" panose="02000000000000000000" pitchFamily="2" charset="0"/>
-                <a:ea typeface="Roboto Medium" panose="02000000000000000000" pitchFamily="2" charset="0"/>
-              </a:rPr>
-              <a:t>Meeting Summary</a:t>
-            </a:r>
-          </a:p>
-          <a:p>
-            <a:pPr marL="180000" indent="-180000">
-              <a:spcAft>
-                <a:spcPts val="300"/>
-              </a:spcAft>
-              <a:buClr>
-                <a:srgbClr val="F17042"/>
-              </a:buClr>
-              <a:buFont typeface="Arial" panose="020B0604020202020204" pitchFamily="34" charset="0"/>
-              <a:buChar char="•"/>
-            </a:pPr>
-            <a:r>
-              <a:rPr lang="en-US" sz="1600">
-                <a:solidFill>
-                  <a:srgbClr val="1D4159"/>
-                </a:solidFill>
-                <a:latin typeface="Roboto" panose="02000000000000000000" pitchFamily="2" charset="0"/>
-                <a:ea typeface="Roboto" panose="02000000000000000000" pitchFamily="2" charset="0"/>
-              </a:rPr>
-              <a:t>Tested transcription functionality</a:t>
-            </a:r>
-          </a:p>
-          <a:p>
-            <a:pPr marL="180000" indent="-180000">
-              <a:spcAft>
-                <a:spcPts val="300"/>
-              </a:spcAft>
-              <a:buClr>
-                <a:srgbClr val="F17042"/>
-              </a:buClr>
-              <a:buFont typeface="Arial" panose="020B0604020202020204" pitchFamily="34" charset="0"/>
-              <a:buChar char="•"/>
-            </a:pPr>
-            <a:r>
-              <a:rPr lang="en-US" sz="1600">
-                <a:solidFill>
-                  <a:srgbClr val="1D4159"/>
-                </a:solidFill>
-                <a:latin typeface="Roboto" panose="02000000000000000000" pitchFamily="2" charset="0"/>
-                <a:ea typeface="Roboto" panose="02000000000000000000" pitchFamily="2" charset="0"/>
-              </a:rPr>
-              <a:t>Verified transcription system effectiveness</a:t>
-            </a:r>
-          </a:p>
-          <a:p>
-            <a:pPr marL="180000" indent="-180000">
-              <a:spcAft>
-                <a:spcPts val="300"/>
-              </a:spcAft>
-              <a:buClr>
-                <a:srgbClr val="F17042"/>
-              </a:buClr>
-              <a:buFont typeface="Arial" panose="020B0604020202020204" pitchFamily="34" charset="0"/>
-              <a:buChar char="•"/>
-            </a:pPr>
-            <a:r>
-              <a:rPr lang="en-US" sz="1600">
-                <a:solidFill>
-                  <a:srgbClr val="1D4159"/>
-                </a:solidFill>
-                <a:latin typeface="Roboto" panose="02000000000000000000" pitchFamily="2" charset="0"/>
-                <a:ea typeface="Roboto" panose="02000000000000000000" pitchFamily="2" charset="0"/>
-              </a:rPr>
-              <a:t>Core requirement: Apply results to project</a:t>
-            </a:r>
-          </a:p>
-          <a:p>
-            <a:pPr marL="180000" indent="-180000">
-              <a:spcAft>
-                <a:spcPts val="300"/>
-              </a:spcAft>
-              <a:buClr>
-                <a:srgbClr val="F17042"/>
-              </a:buClr>
-              <a:buFont typeface="Arial" panose="020B0604020202020204" pitchFamily="34" charset="0"/>
-              <a:buChar char="•"/>
-            </a:pPr>
-            <a:r>
-              <a:rPr lang="en-US" sz="1600">
-                <a:solidFill>
-                  <a:srgbClr val="1D4159"/>
-                </a:solidFill>
-                <a:latin typeface="Roboto" panose="02000000000000000000" pitchFamily="2" charset="0"/>
-                <a:ea typeface="Roboto" panose="02000000000000000000" pitchFamily="2" charset="0"/>
-              </a:rPr>
-              <a:t>Evaluate transcription accuracy</a:t>
-            </a:r>
-          </a:p>
-          <a:p>
-            <a:pPr marL="180000" indent="-180000">
-              <a:spcAft>
-                <a:spcPts val="300"/>
-              </a:spcAft>
-              <a:buClr>
-                <a:srgbClr val="F17042"/>
-              </a:buClr>
-              <a:buFont typeface="Arial" panose="020B0604020202020204" pitchFamily="34" charset="0"/>
-              <a:buChar char="•"/>
-            </a:pPr>
-            <a:r>
-              <a:rPr lang="en-US" sz="1600">
-                <a:solidFill>
-                  <a:srgbClr val="1D4159"/>
-                </a:solidFill>
-                <a:latin typeface="Roboto" panose="02000000000000000000" pitchFamily="2" charset="0"/>
-                <a:ea typeface="Roboto" panose="02000000000000000000" pitchFamily="2" charset="0"/>
-              </a:rPr>
-              <a:t>Develop integration plan</a:t>
-            </a:r>
-          </a:p>
-          <a:p>
-            <a:pPr>
-              <a:spcAft>
-                <a:spcPts val="0"/>
-              </a:spcAft>
-            </a:pPr>
-            <a:endParaRPr lang="en-US"/>
-          </a:p>
-        </p:txBody>
-      </p:sp>
-    </p:spTree>
   </p:cSld>
   <p:clrMapOvr>
     <a:masterClrMapping/>

--- a/someproject11/artifacts/kickoff-deck.pptx
+++ b/someproject11/artifacts/kickoff-deck.pptx
@@ -19,6 +19,7 @@
     <p:sldId id="866" r:id="rId10"/>
     <p:sldId id="858" r:id="rId11"/>
     <p:sldId id="859" r:id="rId12"/>
+    <p:sldId id="901" r:id="rId39"/>
     <p:sldId id="554" r:id="rId13"/>
   </p:sldIdLst>
   <p:sldSz cx="12192000" cy="6858000"/>
@@ -9778,6 +9779,248 @@
         <p14:creationId xmlns:p14="http://schemas.microsoft.com/office/powerpoint/2010/main" val="247990684"/>
       </p:ext>
     </p:extLst>
+  </p:cSld>
+  <p:clrMapOvr>
+    <a:masterClrMapping/>
+  </p:clrMapOvr>
+</p:sld>
+</file>
+
+<file path=ppt/slides/slide10.xml><?xml version="1.0" encoding="utf-8"?>
+<p:sld xmlns:a="http://schemas.openxmlformats.org/drawingml/2006/main" xmlns:p="http://schemas.openxmlformats.org/presentationml/2006/main" xmlns:r="http://schemas.openxmlformats.org/officeDocument/2006/relationships">
+  <p:cSld>
+    <p:spTree>
+      <p:nvGrpSpPr>
+        <p:cNvPr id="1" name=""/>
+        <p:cNvGrpSpPr/>
+        <p:nvPr/>
+      </p:nvGrpSpPr>
+      <p:grpSpPr/>
+      <p:sp>
+        <p:nvSpPr>
+          <p:cNvPr id="2" name="Text Placeholder 1"/>
+          <p:cNvSpPr>
+            <a:spLocks noGrp="1"/>
+          </p:cNvSpPr>
+          <p:nvPr>
+            <p:ph type="body" idx="10" sz="quarter"/>
+          </p:nvPr>
+        </p:nvSpPr>
+        <p:spPr/>
+        <p:txBody>
+          <a:bodyPr/>
+          <a:lstStyle/>
+          <a:p>
+            <a:r>
+              <a:t>Meeting Summary</a:t>
+            </a:r>
+          </a:p>
+        </p:txBody>
+      </p:sp>
+      <p:sp>
+        <p:nvSpPr>
+          <p:cNvPr id="3" name="Text Placeholder 2"/>
+          <p:cNvSpPr>
+            <a:spLocks noGrp="1"/>
+          </p:cNvSpPr>
+          <p:nvPr>
+            <p:ph type="body" idx="11" sz="quarter"/>
+          </p:nvPr>
+        </p:nvSpPr>
+        <p:spPr/>
+        <p:txBody>
+          <a:bodyPr/>
+          <a:lstStyle/>
+          <a:p>
+            <a:r>
+              <a:t>Transcription Service Project</a:t>
+            </a:r>
+          </a:p>
+        </p:txBody>
+      </p:sp>
+      <p:sp>
+        <p:nvSpPr>
+          <p:cNvPr id="4" name="Text Placeholder 3"/>
+          <p:cNvSpPr>
+            <a:spLocks noGrp="1"/>
+          </p:cNvSpPr>
+          <p:nvPr>
+            <p:ph type="body" idx="12" sz="quarter"/>
+          </p:nvPr>
+        </p:nvSpPr>
+        <p:spPr/>
+        <p:txBody>
+          <a:bodyPr/>
+          <a:lstStyle/>
+          <a:p>
+            <a:pPr>
+              <a:spcAft>
+                <a:spcPts val="600"/>
+              </a:spcAft>
+              <a:buNone/>
+            </a:pPr>
+            <a:r>
+              <a:rPr lang="en-US" sz="1800">
+                <a:solidFill>
+                  <a:srgbClr val="1D4159"/>
+                </a:solidFill>
+                <a:latin typeface="Roboto Medium" panose="02000000000000000000" pitchFamily="2" charset="0"/>
+                <a:ea typeface="Roboto Medium" panose="02000000000000000000" pitchFamily="2" charset="0"/>
+              </a:rPr>
+              <a:t>Purpose</a:t>
+            </a:r>
+          </a:p>
+          <a:p>
+            <a:pPr marL="180000" indent="-180000">
+              <a:spcAft>
+                <a:spcPts val="300"/>
+              </a:spcAft>
+              <a:buClr>
+                <a:srgbClr val="F17042"/>
+              </a:buClr>
+              <a:buFont typeface="Arial" panose="020B0604020202020204" pitchFamily="34" charset="0"/>
+              <a:buChar char="•"/>
+            </a:pPr>
+            <a:r>
+              <a:rPr lang="en-US" sz="1600">
+                <a:solidFill>
+                  <a:srgbClr val="1D4159"/>
+                </a:solidFill>
+                <a:latin typeface="Roboto" panose="02000000000000000000" pitchFamily="2" charset="0"/>
+                <a:ea typeface="Roboto" panose="02000000000000000000" pitchFamily="2" charset="0"/>
+              </a:rPr>
+              <a:t>Test transcription service functionality</a:t>
+            </a:r>
+          </a:p>
+          <a:p>
+            <a:pPr>
+              <a:spcAft>
+                <a:spcPts val="0"/>
+              </a:spcAft>
+            </a:pPr>
+            <a:endParaRPr lang="en-US"/>
+          </a:p>
+          <a:p>
+            <a:pPr>
+              <a:spcAft>
+                <a:spcPts val="600"/>
+              </a:spcAft>
+              <a:buNone/>
+            </a:pPr>
+            <a:r>
+              <a:rPr lang="en-US" sz="1800">
+                <a:solidFill>
+                  <a:srgbClr val="1D4159"/>
+                </a:solidFill>
+                <a:latin typeface="Roboto Medium" panose="02000000000000000000" pitchFamily="2" charset="0"/>
+                <a:ea typeface="Roboto Medium" panose="02000000000000000000" pitchFamily="2" charset="0"/>
+              </a:rPr>
+              <a:t>Key Discussions</a:t>
+            </a:r>
+          </a:p>
+          <a:p>
+            <a:pPr marL="180000" indent="-180000">
+              <a:spcAft>
+                <a:spcPts val="300"/>
+              </a:spcAft>
+              <a:buClr>
+                <a:srgbClr val="F17042"/>
+              </a:buClr>
+              <a:buFont typeface="Arial" panose="020B0604020202020204" pitchFamily="34" charset="0"/>
+              <a:buChar char="•"/>
+            </a:pPr>
+            <a:r>
+              <a:rPr lang="en-US" sz="1600">
+                <a:solidFill>
+                  <a:srgbClr val="1D4159"/>
+                </a:solidFill>
+                <a:latin typeface="Roboto" panose="02000000000000000000" pitchFamily="2" charset="0"/>
+                <a:ea typeface="Roboto" panose="02000000000000000000" pitchFamily="2" charset="0"/>
+              </a:rPr>
+              <a:t>Transcription service testing</a:t>
+            </a:r>
+          </a:p>
+          <a:p>
+            <a:pPr marL="180000" indent="-180000">
+              <a:spcAft>
+                <a:spcPts val="300"/>
+              </a:spcAft>
+              <a:buClr>
+                <a:srgbClr val="F17042"/>
+              </a:buClr>
+              <a:buFont typeface="Arial" panose="020B0604020202020204" pitchFamily="34" charset="0"/>
+              <a:buChar char="•"/>
+            </a:pPr>
+            <a:r>
+              <a:rPr lang="en-US" sz="1600">
+                <a:solidFill>
+                  <a:srgbClr val="1D4159"/>
+                </a:solidFill>
+                <a:latin typeface="Roboto" panose="02000000000000000000" pitchFamily="2" charset="0"/>
+                <a:ea typeface="Roboto" panose="02000000000000000000" pitchFamily="2" charset="0"/>
+              </a:rPr>
+              <a:t>Project integration requirements</a:t>
+            </a:r>
+          </a:p>
+          <a:p>
+            <a:pPr>
+              <a:spcAft>
+                <a:spcPts val="0"/>
+              </a:spcAft>
+            </a:pPr>
+            <a:endParaRPr lang="en-US"/>
+          </a:p>
+          <a:p>
+            <a:pPr>
+              <a:spcAft>
+                <a:spcPts val="600"/>
+              </a:spcAft>
+              <a:buNone/>
+            </a:pPr>
+            <a:r>
+              <a:rPr lang="en-US" sz="1800">
+                <a:solidFill>
+                  <a:srgbClr val="1D4159"/>
+                </a:solidFill>
+                <a:latin typeface="Roboto Medium" panose="02000000000000000000" pitchFamily="2" charset="0"/>
+                <a:ea typeface="Roboto Medium" panose="02000000000000000000" pitchFamily="2" charset="0"/>
+              </a:rPr>
+              <a:t>Action Items</a:t>
+            </a:r>
+          </a:p>
+          <a:p>
+            <a:pPr marL="180000" indent="-180000">
+              <a:spcAft>
+                <a:spcPts val="300"/>
+              </a:spcAft>
+              <a:buClr>
+                <a:srgbClr val="F17042"/>
+              </a:buClr>
+              <a:buFont typeface="Arial" panose="020B0604020202020204" pitchFamily="34" charset="0"/>
+              <a:buChar char="•"/>
+            </a:pPr>
+            <a:r>
+              <a:rPr lang="en-US" sz="1600">
+                <a:solidFill>
+                  <a:srgbClr val="1D4159"/>
+                </a:solidFill>
+                <a:latin typeface="Roboto" panose="02000000000000000000" pitchFamily="2" charset="0"/>
+                <a:ea typeface="Roboto" panose="02000000000000000000" pitchFamily="2" charset="0"/>
+              </a:rPr>
+              <a:t>Verify transcription accuracy</a:t>
+            </a:r>
+          </a:p>
+          <a:p>
+            <a:pPr>
+              <a:spcAft>
+                <a:spcPts val="0"/>
+              </a:spcAft>
+            </a:pPr>
+            <a:endParaRPr lang="en-US"/>
+          </a:p>
+        </p:txBody>
+      </p:sp>
+    </p:spTree>
   </p:cSld>
   <p:clrMapOvr>
     <a:masterClrMapping/>
